--- a/site/docs/source/OPS-NAI-Graphics.pptx
+++ b/site/docs/source/OPS-NAI-Graphics.pptx
@@ -215,7 +215,7 @@
           <a:p>
             <a:fld id="{C643A962-1FD4-4C83-A809-27EA9E9230E6}" type="datetimeFigureOut">
               <a:rPr lang="en-US" smtClean="0"/>
-              <a:t>4/20/2026</a:t>
+              <a:t>4/21/2026</a:t>
             </a:fld>
             <a:endParaRPr lang="en-US"/>
           </a:p>
@@ -1457,7 +1457,7 @@
           <a:p>
             <a:fld id="{8D392E4A-9BBD-4BA9-88BA-F92D78D6CF9B}" type="datetimeFigureOut">
               <a:rPr lang="en-US" smtClean="0"/>
-              <a:t>4/20/2026</a:t>
+              <a:t>4/21/2026</a:t>
             </a:fld>
             <a:endParaRPr lang="en-US"/>
           </a:p>
@@ -1655,7 +1655,7 @@
           <a:p>
             <a:fld id="{8D392E4A-9BBD-4BA9-88BA-F92D78D6CF9B}" type="datetimeFigureOut">
               <a:rPr lang="en-US" smtClean="0"/>
-              <a:t>4/20/2026</a:t>
+              <a:t>4/21/2026</a:t>
             </a:fld>
             <a:endParaRPr lang="en-US"/>
           </a:p>
@@ -1863,7 +1863,7 @@
           <a:p>
             <a:fld id="{8D392E4A-9BBD-4BA9-88BA-F92D78D6CF9B}" type="datetimeFigureOut">
               <a:rPr lang="en-US" smtClean="0"/>
-              <a:t>4/20/2026</a:t>
+              <a:t>4/21/2026</a:t>
             </a:fld>
             <a:endParaRPr lang="en-US"/>
           </a:p>
@@ -2061,7 +2061,7 @@
           <a:p>
             <a:fld id="{8D392E4A-9BBD-4BA9-88BA-F92D78D6CF9B}" type="datetimeFigureOut">
               <a:rPr lang="en-US" smtClean="0"/>
-              <a:t>4/20/2026</a:t>
+              <a:t>4/21/2026</a:t>
             </a:fld>
             <a:endParaRPr lang="en-US"/>
           </a:p>
@@ -2336,7 +2336,7 @@
           <a:p>
             <a:fld id="{8D392E4A-9BBD-4BA9-88BA-F92D78D6CF9B}" type="datetimeFigureOut">
               <a:rPr lang="en-US" smtClean="0"/>
-              <a:t>4/20/2026</a:t>
+              <a:t>4/21/2026</a:t>
             </a:fld>
             <a:endParaRPr lang="en-US"/>
           </a:p>
@@ -2601,7 +2601,7 @@
           <a:p>
             <a:fld id="{8D392E4A-9BBD-4BA9-88BA-F92D78D6CF9B}" type="datetimeFigureOut">
               <a:rPr lang="en-US" smtClean="0"/>
-              <a:t>4/20/2026</a:t>
+              <a:t>4/21/2026</a:t>
             </a:fld>
             <a:endParaRPr lang="en-US"/>
           </a:p>
@@ -3013,7 +3013,7 @@
           <a:p>
             <a:fld id="{8D392E4A-9BBD-4BA9-88BA-F92D78D6CF9B}" type="datetimeFigureOut">
               <a:rPr lang="en-US" smtClean="0"/>
-              <a:t>4/20/2026</a:t>
+              <a:t>4/21/2026</a:t>
             </a:fld>
             <a:endParaRPr lang="en-US"/>
           </a:p>
@@ -3154,7 +3154,7 @@
           <a:p>
             <a:fld id="{8D392E4A-9BBD-4BA9-88BA-F92D78D6CF9B}" type="datetimeFigureOut">
               <a:rPr lang="en-US" smtClean="0"/>
-              <a:t>4/20/2026</a:t>
+              <a:t>4/21/2026</a:t>
             </a:fld>
             <a:endParaRPr lang="en-US"/>
           </a:p>
@@ -3267,7 +3267,7 @@
           <a:p>
             <a:fld id="{8D392E4A-9BBD-4BA9-88BA-F92D78D6CF9B}" type="datetimeFigureOut">
               <a:rPr lang="en-US" smtClean="0"/>
-              <a:t>4/20/2026</a:t>
+              <a:t>4/21/2026</a:t>
             </a:fld>
             <a:endParaRPr lang="en-US"/>
           </a:p>
@@ -3578,7 +3578,7 @@
           <a:p>
             <a:fld id="{8D392E4A-9BBD-4BA9-88BA-F92D78D6CF9B}" type="datetimeFigureOut">
               <a:rPr lang="en-US" smtClean="0"/>
-              <a:t>4/20/2026</a:t>
+              <a:t>4/21/2026</a:t>
             </a:fld>
             <a:endParaRPr lang="en-US"/>
           </a:p>
@@ -3866,7 +3866,7 @@
           <a:p>
             <a:fld id="{8D392E4A-9BBD-4BA9-88BA-F92D78D6CF9B}" type="datetimeFigureOut">
               <a:rPr lang="en-US" smtClean="0"/>
-              <a:t>4/20/2026</a:t>
+              <a:t>4/21/2026</a:t>
             </a:fld>
             <a:endParaRPr lang="en-US"/>
           </a:p>
@@ -4107,7 +4107,7 @@
           <a:p>
             <a:fld id="{8D392E4A-9BBD-4BA9-88BA-F92D78D6CF9B}" type="datetimeFigureOut">
               <a:rPr lang="en-US" smtClean="0"/>
-              <a:t>4/20/2026</a:t>
+              <a:t>4/21/2026</a:t>
             </a:fld>
             <a:endParaRPr lang="en-US"/>
           </a:p>
@@ -14283,6 +14283,135 @@
           </p:txBody>
         </p:sp>
       </p:grpSp>
+      <p:grpSp>
+        <p:nvGrpSpPr>
+          <p:cNvPr id="42" name="Group 41">
+            <a:extLst>
+              <a:ext uri="{FF2B5EF4-FFF2-40B4-BE49-F238E27FC236}">
+                <a16:creationId xmlns:a16="http://schemas.microsoft.com/office/drawing/2014/main" id="{C0845315-2D93-BEA3-4762-FB78AAA2F394}"/>
+              </a:ext>
+            </a:extLst>
+          </p:cNvPr>
+          <p:cNvGrpSpPr/>
+          <p:nvPr/>
+        </p:nvGrpSpPr>
+        <p:grpSpPr>
+          <a:xfrm rot="372552">
+            <a:off x="7183567" y="5289608"/>
+            <a:ext cx="4273189" cy="1235279"/>
+            <a:chOff x="3998111" y="1320038"/>
+            <a:chExt cx="4273189" cy="1235279"/>
+          </a:xfrm>
+        </p:grpSpPr>
+        <p:cxnSp>
+          <p:nvCxnSpPr>
+            <p:cNvPr id="43" name="Connector: Elbow 42">
+              <a:extLst>
+                <a:ext uri="{FF2B5EF4-FFF2-40B4-BE49-F238E27FC236}">
+                  <a16:creationId xmlns:a16="http://schemas.microsoft.com/office/drawing/2014/main" id="{6178C8F6-B5D0-D37C-79CC-1D117E5E4F9D}"/>
+                </a:ext>
+              </a:extLst>
+            </p:cNvPr>
+            <p:cNvCxnSpPr>
+              <a:cxnSpLocks/>
+              <a:stCxn id="44" idx="3"/>
+            </p:cNvCxnSpPr>
+            <p:nvPr/>
+          </p:nvCxnSpPr>
+          <p:spPr>
+            <a:xfrm rot="19870561">
+              <a:off x="4430820" y="1320038"/>
+              <a:ext cx="3840480" cy="182880"/>
+            </a:xfrm>
+            <a:prstGeom prst="bentConnector3">
+              <a:avLst/>
+            </a:prstGeom>
+            <a:ln w="38100">
+              <a:solidFill>
+                <a:srgbClr val="FF0000"/>
+              </a:solidFill>
+              <a:tailEnd type="triangle"/>
+            </a:ln>
+          </p:spPr>
+          <p:style>
+            <a:lnRef idx="2">
+              <a:schemeClr val="accent1"/>
+            </a:lnRef>
+            <a:fillRef idx="0">
+              <a:schemeClr val="accent1"/>
+            </a:fillRef>
+            <a:effectRef idx="1">
+              <a:schemeClr val="accent1"/>
+            </a:effectRef>
+            <a:fontRef idx="minor">
+              <a:schemeClr val="tx1"/>
+            </a:fontRef>
+          </p:style>
+        </p:cxnSp>
+        <p:sp>
+          <p:nvSpPr>
+            <p:cNvPr id="44" name="Rectangle 43">
+              <a:extLst>
+                <a:ext uri="{FF2B5EF4-FFF2-40B4-BE49-F238E27FC236}">
+                  <a16:creationId xmlns:a16="http://schemas.microsoft.com/office/drawing/2014/main" id="{B66C7D03-F583-4BF4-7FBF-976F2022FC94}"/>
+                </a:ext>
+              </a:extLst>
+            </p:cNvPr>
+            <p:cNvSpPr/>
+            <p:nvPr/>
+          </p:nvSpPr>
+          <p:spPr>
+            <a:xfrm rot="19870561">
+              <a:off x="3998111" y="2280997"/>
+              <a:ext cx="667910" cy="274320"/>
+            </a:xfrm>
+            <a:prstGeom prst="rect">
+              <a:avLst/>
+            </a:prstGeom>
+            <a:solidFill>
+              <a:schemeClr val="bg1"/>
+            </a:solidFill>
+            <a:ln w="28575">
+              <a:solidFill>
+                <a:srgbClr val="FF0000"/>
+              </a:solidFill>
+            </a:ln>
+          </p:spPr>
+          <p:style>
+            <a:lnRef idx="2">
+              <a:schemeClr val="accent1">
+                <a:shade val="15000"/>
+              </a:schemeClr>
+            </a:lnRef>
+            <a:fillRef idx="1">
+              <a:schemeClr val="accent1"/>
+            </a:fillRef>
+            <a:effectRef idx="0">
+              <a:schemeClr val="accent1"/>
+            </a:effectRef>
+            <a:fontRef idx="minor">
+              <a:schemeClr val="lt1"/>
+            </a:fontRef>
+          </p:style>
+          <p:txBody>
+            <a:bodyPr rtlCol="0" anchor="ctr"/>
+            <a:lstStyle/>
+            <a:p>
+              <a:pPr algn="ctr"/>
+              <a:r>
+                <a:rPr lang="en-US" sz="1600" b="1" dirty="0">
+                  <a:solidFill>
+                    <a:srgbClr val="FF0000"/>
+                  </a:solidFill>
+                  <a:latin typeface="Times New Roman" panose="02020603050405020304" pitchFamily="18" charset="0"/>
+                  <a:cs typeface="Times New Roman" panose="02020603050405020304" pitchFamily="18" charset="0"/>
+                </a:rPr>
+                <a:t>P</a:t>
+              </a:r>
+            </a:p>
+          </p:txBody>
+        </p:sp>
+      </p:grpSp>
     </p:spTree>
     <p:extLst>
       <p:ext uri="{BB962C8B-B14F-4D97-AF65-F5344CB8AC3E}">
@@ -14297,7 +14426,7 @@
 </file>
 
 <file path=ppt/slides/slide5.xml><?xml version="1.0" encoding="utf-8"?>
-<p:sld xmlns:a="http://schemas.openxmlformats.org/drawingml/2006/main" xmlns:r="http://schemas.openxmlformats.org/officeDocument/2006/relationships" xmlns:p="http://schemas.openxmlformats.org/presentationml/2006/main">
+<p:sld xmlns:a="http://schemas.openxmlformats.org/drawingml/2006/main" xmlns:r="http://schemas.openxmlformats.org/officeDocument/2006/relationships" xmlns:p="http://schemas.openxmlformats.org/presentationml/2006/main" show="0">
   <p:cSld>
     <p:bg>
       <p:bgPr>
@@ -15540,7 +15669,7 @@
 </file>
 
 <file path=ppt/slides/slide6.xml><?xml version="1.0" encoding="utf-8"?>
-<p:sld xmlns:a="http://schemas.openxmlformats.org/drawingml/2006/main" xmlns:r="http://schemas.openxmlformats.org/officeDocument/2006/relationships" xmlns:p="http://schemas.openxmlformats.org/presentationml/2006/main">
+<p:sld xmlns:a="http://schemas.openxmlformats.org/drawingml/2006/main" xmlns:r="http://schemas.openxmlformats.org/officeDocument/2006/relationships" xmlns:p="http://schemas.openxmlformats.org/presentationml/2006/main" show="0">
   <p:cSld>
     <p:bg>
       <p:bgPr>
@@ -19201,7 +19330,7 @@
 </file>
 
 <file path=ppt/slides/slide7.xml><?xml version="1.0" encoding="utf-8"?>
-<p:sld xmlns:a="http://schemas.openxmlformats.org/drawingml/2006/main" xmlns:r="http://schemas.openxmlformats.org/officeDocument/2006/relationships" xmlns:p="http://schemas.openxmlformats.org/presentationml/2006/main">
+<p:sld xmlns:a="http://schemas.openxmlformats.org/drawingml/2006/main" xmlns:r="http://schemas.openxmlformats.org/officeDocument/2006/relationships" xmlns:p="http://schemas.openxmlformats.org/presentationml/2006/main" show="0">
   <p:cSld>
     <p:bg>
       <p:bgPr>
@@ -19972,7 +20101,7 @@
 </file>
 
 <file path=ppt/slides/slide8.xml><?xml version="1.0" encoding="utf-8"?>
-<p:sld xmlns:a="http://schemas.openxmlformats.org/drawingml/2006/main" xmlns:r="http://schemas.openxmlformats.org/officeDocument/2006/relationships" xmlns:p="http://schemas.openxmlformats.org/presentationml/2006/main">
+<p:sld xmlns:a="http://schemas.openxmlformats.org/drawingml/2006/main" xmlns:r="http://schemas.openxmlformats.org/officeDocument/2006/relationships" xmlns:p="http://schemas.openxmlformats.org/presentationml/2006/main" show="0">
   <p:cSld>
     <p:bg>
       <p:bgPr>

--- a/site/docs/source/OPS-NAI-Graphics.pptx
+++ b/site/docs/source/OPS-NAI-Graphics.pptx
@@ -215,7 +215,7 @@
           <a:p>
             <a:fld id="{C643A962-1FD4-4C83-A809-27EA9E9230E6}" type="datetimeFigureOut">
               <a:rPr lang="en-US" smtClean="0"/>
-              <a:t>4/21/2026</a:t>
+              <a:t>4/22/2026</a:t>
             </a:fld>
             <a:endParaRPr lang="en-US"/>
           </a:p>
@@ -1457,7 +1457,7 @@
           <a:p>
             <a:fld id="{8D392E4A-9BBD-4BA9-88BA-F92D78D6CF9B}" type="datetimeFigureOut">
               <a:rPr lang="en-US" smtClean="0"/>
-              <a:t>4/21/2026</a:t>
+              <a:t>4/22/2026</a:t>
             </a:fld>
             <a:endParaRPr lang="en-US"/>
           </a:p>
@@ -1655,7 +1655,7 @@
           <a:p>
             <a:fld id="{8D392E4A-9BBD-4BA9-88BA-F92D78D6CF9B}" type="datetimeFigureOut">
               <a:rPr lang="en-US" smtClean="0"/>
-              <a:t>4/21/2026</a:t>
+              <a:t>4/22/2026</a:t>
             </a:fld>
             <a:endParaRPr lang="en-US"/>
           </a:p>
@@ -1863,7 +1863,7 @@
           <a:p>
             <a:fld id="{8D392E4A-9BBD-4BA9-88BA-F92D78D6CF9B}" type="datetimeFigureOut">
               <a:rPr lang="en-US" smtClean="0"/>
-              <a:t>4/21/2026</a:t>
+              <a:t>4/22/2026</a:t>
             </a:fld>
             <a:endParaRPr lang="en-US"/>
           </a:p>
@@ -2061,7 +2061,7 @@
           <a:p>
             <a:fld id="{8D392E4A-9BBD-4BA9-88BA-F92D78D6CF9B}" type="datetimeFigureOut">
               <a:rPr lang="en-US" smtClean="0"/>
-              <a:t>4/21/2026</a:t>
+              <a:t>4/22/2026</a:t>
             </a:fld>
             <a:endParaRPr lang="en-US"/>
           </a:p>
@@ -2336,7 +2336,7 @@
           <a:p>
             <a:fld id="{8D392E4A-9BBD-4BA9-88BA-F92D78D6CF9B}" type="datetimeFigureOut">
               <a:rPr lang="en-US" smtClean="0"/>
-              <a:t>4/21/2026</a:t>
+              <a:t>4/22/2026</a:t>
             </a:fld>
             <a:endParaRPr lang="en-US"/>
           </a:p>
@@ -2601,7 +2601,7 @@
           <a:p>
             <a:fld id="{8D392E4A-9BBD-4BA9-88BA-F92D78D6CF9B}" type="datetimeFigureOut">
               <a:rPr lang="en-US" smtClean="0"/>
-              <a:t>4/21/2026</a:t>
+              <a:t>4/22/2026</a:t>
             </a:fld>
             <a:endParaRPr lang="en-US"/>
           </a:p>
@@ -3013,7 +3013,7 @@
           <a:p>
             <a:fld id="{8D392E4A-9BBD-4BA9-88BA-F92D78D6CF9B}" type="datetimeFigureOut">
               <a:rPr lang="en-US" smtClean="0"/>
-              <a:t>4/21/2026</a:t>
+              <a:t>4/22/2026</a:t>
             </a:fld>
             <a:endParaRPr lang="en-US"/>
           </a:p>
@@ -3154,7 +3154,7 @@
           <a:p>
             <a:fld id="{8D392E4A-9BBD-4BA9-88BA-F92D78D6CF9B}" type="datetimeFigureOut">
               <a:rPr lang="en-US" smtClean="0"/>
-              <a:t>4/21/2026</a:t>
+              <a:t>4/22/2026</a:t>
             </a:fld>
             <a:endParaRPr lang="en-US"/>
           </a:p>
@@ -3267,7 +3267,7 @@
           <a:p>
             <a:fld id="{8D392E4A-9BBD-4BA9-88BA-F92D78D6CF9B}" type="datetimeFigureOut">
               <a:rPr lang="en-US" smtClean="0"/>
-              <a:t>4/21/2026</a:t>
+              <a:t>4/22/2026</a:t>
             </a:fld>
             <a:endParaRPr lang="en-US"/>
           </a:p>
@@ -3578,7 +3578,7 @@
           <a:p>
             <a:fld id="{8D392E4A-9BBD-4BA9-88BA-F92D78D6CF9B}" type="datetimeFigureOut">
               <a:rPr lang="en-US" smtClean="0"/>
-              <a:t>4/21/2026</a:t>
+              <a:t>4/22/2026</a:t>
             </a:fld>
             <a:endParaRPr lang="en-US"/>
           </a:p>
@@ -3866,7 +3866,7 @@
           <a:p>
             <a:fld id="{8D392E4A-9BBD-4BA9-88BA-F92D78D6CF9B}" type="datetimeFigureOut">
               <a:rPr lang="en-US" smtClean="0"/>
-              <a:t>4/21/2026</a:t>
+              <a:t>4/22/2026</a:t>
             </a:fld>
             <a:endParaRPr lang="en-US"/>
           </a:p>
@@ -4107,7 +4107,7 @@
           <a:p>
             <a:fld id="{8D392E4A-9BBD-4BA9-88BA-F92D78D6CF9B}" type="datetimeFigureOut">
               <a:rPr lang="en-US" smtClean="0"/>
-              <a:t>4/21/2026</a:t>
+              <a:t>4/22/2026</a:t>
             </a:fld>
             <a:endParaRPr lang="en-US"/>
           </a:p>
@@ -9098,6 +9098,198 @@
                 <a:cs typeface="Times New Roman" panose="02020603050405020304" pitchFamily="18" charset="0"/>
               </a:rPr>
               <a:t>SECFOR Patrol Ops</a:t>
+            </a:r>
+          </a:p>
+        </p:txBody>
+      </p:sp>
+      <p:sp>
+        <p:nvSpPr>
+          <p:cNvPr id="15" name="TextBox 14">
+            <a:extLst>
+              <a:ext uri="{FF2B5EF4-FFF2-40B4-BE49-F238E27FC236}">
+                <a16:creationId xmlns:a16="http://schemas.microsoft.com/office/drawing/2014/main" id="{1B8FBC90-0736-0F93-E811-383BF1B32DD3}"/>
+              </a:ext>
+            </a:extLst>
+          </p:cNvPr>
+          <p:cNvSpPr txBox="1"/>
+          <p:nvPr/>
+        </p:nvSpPr>
+        <p:spPr>
+          <a:xfrm rot="19751697">
+            <a:off x="4296452" y="2269775"/>
+            <a:ext cx="777777" cy="276999"/>
+          </a:xfrm>
+          <a:prstGeom prst="rect">
+            <a:avLst/>
+          </a:prstGeom>
+          <a:solidFill>
+            <a:schemeClr val="bg1"/>
+          </a:solidFill>
+          <a:ln w="38100">
+            <a:solidFill>
+              <a:srgbClr val="FF0000"/>
+            </a:solidFill>
+          </a:ln>
+        </p:spPr>
+        <p:txBody>
+          <a:bodyPr wrap="none" rtlCol="0">
+            <a:spAutoFit/>
+          </a:bodyPr>
+          <a:lstStyle/>
+          <a:p>
+            <a:r>
+              <a:rPr lang="en-US" sz="1200" b="1" dirty="0">
+                <a:solidFill>
+                  <a:srgbClr val="FF0000"/>
+                </a:solidFill>
+                <a:latin typeface="Times New Roman" panose="02020603050405020304" pitchFamily="18" charset="0"/>
+                <a:cs typeface="Times New Roman" panose="02020603050405020304" pitchFamily="18" charset="0"/>
+              </a:rPr>
+              <a:t>~ 2700 m</a:t>
+            </a:r>
+          </a:p>
+        </p:txBody>
+      </p:sp>
+      <p:sp>
+        <p:nvSpPr>
+          <p:cNvPr id="16" name="TextBox 15">
+            <a:extLst>
+              <a:ext uri="{FF2B5EF4-FFF2-40B4-BE49-F238E27FC236}">
+                <a16:creationId xmlns:a16="http://schemas.microsoft.com/office/drawing/2014/main" id="{1545C867-275A-241F-E67A-BAD10F0BE41C}"/>
+              </a:ext>
+            </a:extLst>
+          </p:cNvPr>
+          <p:cNvSpPr txBox="1"/>
+          <p:nvPr/>
+        </p:nvSpPr>
+        <p:spPr>
+          <a:xfrm rot="1028481">
+            <a:off x="7411757" y="2649479"/>
+            <a:ext cx="777777" cy="276999"/>
+          </a:xfrm>
+          <a:prstGeom prst="rect">
+            <a:avLst/>
+          </a:prstGeom>
+          <a:solidFill>
+            <a:schemeClr val="bg1"/>
+          </a:solidFill>
+          <a:ln w="38100">
+            <a:solidFill>
+              <a:srgbClr val="FF0000"/>
+            </a:solidFill>
+          </a:ln>
+        </p:spPr>
+        <p:txBody>
+          <a:bodyPr wrap="none" rtlCol="0">
+            <a:spAutoFit/>
+          </a:bodyPr>
+          <a:lstStyle/>
+          <a:p>
+            <a:r>
+              <a:rPr lang="en-US" sz="1200" b="1" dirty="0">
+                <a:solidFill>
+                  <a:srgbClr val="FF0000"/>
+                </a:solidFill>
+                <a:latin typeface="Times New Roman" panose="02020603050405020304" pitchFamily="18" charset="0"/>
+                <a:cs typeface="Times New Roman" panose="02020603050405020304" pitchFamily="18" charset="0"/>
+              </a:rPr>
+              <a:t>~ 2200 m</a:t>
+            </a:r>
+          </a:p>
+        </p:txBody>
+      </p:sp>
+      <p:sp>
+        <p:nvSpPr>
+          <p:cNvPr id="17" name="TextBox 16">
+            <a:extLst>
+              <a:ext uri="{FF2B5EF4-FFF2-40B4-BE49-F238E27FC236}">
+                <a16:creationId xmlns:a16="http://schemas.microsoft.com/office/drawing/2014/main" id="{DF6A0F5D-84A2-9E5F-98FE-D002FBAEAA79}"/>
+              </a:ext>
+            </a:extLst>
+          </p:cNvPr>
+          <p:cNvSpPr txBox="1"/>
+          <p:nvPr/>
+        </p:nvSpPr>
+        <p:spPr>
+          <a:xfrm rot="20290655">
+            <a:off x="7479287" y="5495774"/>
+            <a:ext cx="777777" cy="276999"/>
+          </a:xfrm>
+          <a:prstGeom prst="rect">
+            <a:avLst/>
+          </a:prstGeom>
+          <a:solidFill>
+            <a:schemeClr val="bg1"/>
+          </a:solidFill>
+          <a:ln w="38100">
+            <a:solidFill>
+              <a:srgbClr val="FF0000"/>
+            </a:solidFill>
+          </a:ln>
+        </p:spPr>
+        <p:txBody>
+          <a:bodyPr wrap="none" rtlCol="0">
+            <a:spAutoFit/>
+          </a:bodyPr>
+          <a:lstStyle/>
+          <a:p>
+            <a:r>
+              <a:rPr lang="en-US" sz="1200" b="1" dirty="0">
+                <a:solidFill>
+                  <a:srgbClr val="FF0000"/>
+                </a:solidFill>
+                <a:latin typeface="Times New Roman" panose="02020603050405020304" pitchFamily="18" charset="0"/>
+                <a:cs typeface="Times New Roman" panose="02020603050405020304" pitchFamily="18" charset="0"/>
+              </a:rPr>
+              <a:t>~ 2200 m</a:t>
+            </a:r>
+          </a:p>
+        </p:txBody>
+      </p:sp>
+      <p:sp>
+        <p:nvSpPr>
+          <p:cNvPr id="18" name="TextBox 17">
+            <a:extLst>
+              <a:ext uri="{FF2B5EF4-FFF2-40B4-BE49-F238E27FC236}">
+                <a16:creationId xmlns:a16="http://schemas.microsoft.com/office/drawing/2014/main" id="{D734E6EB-98AF-C373-98EC-3A041F979F85}"/>
+              </a:ext>
+            </a:extLst>
+          </p:cNvPr>
+          <p:cNvSpPr txBox="1"/>
+          <p:nvPr/>
+        </p:nvSpPr>
+        <p:spPr>
+          <a:xfrm rot="1847095">
+            <a:off x="4870190" y="5333472"/>
+            <a:ext cx="777777" cy="276999"/>
+          </a:xfrm>
+          <a:prstGeom prst="rect">
+            <a:avLst/>
+          </a:prstGeom>
+          <a:solidFill>
+            <a:schemeClr val="bg1"/>
+          </a:solidFill>
+          <a:ln w="38100">
+            <a:solidFill>
+              <a:srgbClr val="FF0000"/>
+            </a:solidFill>
+          </a:ln>
+        </p:spPr>
+        <p:txBody>
+          <a:bodyPr wrap="none" rtlCol="0">
+            <a:spAutoFit/>
+          </a:bodyPr>
+          <a:lstStyle/>
+          <a:p>
+            <a:r>
+              <a:rPr lang="en-US" sz="1200" b="1" dirty="0">
+                <a:solidFill>
+                  <a:srgbClr val="FF0000"/>
+                </a:solidFill>
+                <a:latin typeface="Times New Roman" panose="02020603050405020304" pitchFamily="18" charset="0"/>
+                <a:cs typeface="Times New Roman" panose="02020603050405020304" pitchFamily="18" charset="0"/>
+              </a:rPr>
+              <a:t>~ 2200 m</a:t>
             </a:r>
           </a:p>
         </p:txBody>

--- a/site/docs/source/OPS-NAI-Graphics.pptx
+++ b/site/docs/source/OPS-NAI-Graphics.pptx
@@ -215,7 +215,7 @@
           <a:p>
             <a:fld id="{C643A962-1FD4-4C83-A809-27EA9E9230E6}" type="datetimeFigureOut">
               <a:rPr lang="en-US" smtClean="0"/>
-              <a:t>4/22/2026</a:t>
+              <a:t>4/30/2026</a:t>
             </a:fld>
             <a:endParaRPr lang="en-US"/>
           </a:p>
@@ -1457,7 +1457,7 @@
           <a:p>
             <a:fld id="{8D392E4A-9BBD-4BA9-88BA-F92D78D6CF9B}" type="datetimeFigureOut">
               <a:rPr lang="en-US" smtClean="0"/>
-              <a:t>4/22/2026</a:t>
+              <a:t>4/30/2026</a:t>
             </a:fld>
             <a:endParaRPr lang="en-US"/>
           </a:p>
@@ -1655,7 +1655,7 @@
           <a:p>
             <a:fld id="{8D392E4A-9BBD-4BA9-88BA-F92D78D6CF9B}" type="datetimeFigureOut">
               <a:rPr lang="en-US" smtClean="0"/>
-              <a:t>4/22/2026</a:t>
+              <a:t>4/30/2026</a:t>
             </a:fld>
             <a:endParaRPr lang="en-US"/>
           </a:p>
@@ -1863,7 +1863,7 @@
           <a:p>
             <a:fld id="{8D392E4A-9BBD-4BA9-88BA-F92D78D6CF9B}" type="datetimeFigureOut">
               <a:rPr lang="en-US" smtClean="0"/>
-              <a:t>4/22/2026</a:t>
+              <a:t>4/30/2026</a:t>
             </a:fld>
             <a:endParaRPr lang="en-US"/>
           </a:p>
@@ -2061,7 +2061,7 @@
           <a:p>
             <a:fld id="{8D392E4A-9BBD-4BA9-88BA-F92D78D6CF9B}" type="datetimeFigureOut">
               <a:rPr lang="en-US" smtClean="0"/>
-              <a:t>4/22/2026</a:t>
+              <a:t>4/30/2026</a:t>
             </a:fld>
             <a:endParaRPr lang="en-US"/>
           </a:p>
@@ -2336,7 +2336,7 @@
           <a:p>
             <a:fld id="{8D392E4A-9BBD-4BA9-88BA-F92D78D6CF9B}" type="datetimeFigureOut">
               <a:rPr lang="en-US" smtClean="0"/>
-              <a:t>4/22/2026</a:t>
+              <a:t>4/30/2026</a:t>
             </a:fld>
             <a:endParaRPr lang="en-US"/>
           </a:p>
@@ -2601,7 +2601,7 @@
           <a:p>
             <a:fld id="{8D392E4A-9BBD-4BA9-88BA-F92D78D6CF9B}" type="datetimeFigureOut">
               <a:rPr lang="en-US" smtClean="0"/>
-              <a:t>4/22/2026</a:t>
+              <a:t>4/30/2026</a:t>
             </a:fld>
             <a:endParaRPr lang="en-US"/>
           </a:p>
@@ -3013,7 +3013,7 @@
           <a:p>
             <a:fld id="{8D392E4A-9BBD-4BA9-88BA-F92D78D6CF9B}" type="datetimeFigureOut">
               <a:rPr lang="en-US" smtClean="0"/>
-              <a:t>4/22/2026</a:t>
+              <a:t>4/30/2026</a:t>
             </a:fld>
             <a:endParaRPr lang="en-US"/>
           </a:p>
@@ -3154,7 +3154,7 @@
           <a:p>
             <a:fld id="{8D392E4A-9BBD-4BA9-88BA-F92D78D6CF9B}" type="datetimeFigureOut">
               <a:rPr lang="en-US" smtClean="0"/>
-              <a:t>4/22/2026</a:t>
+              <a:t>4/30/2026</a:t>
             </a:fld>
             <a:endParaRPr lang="en-US"/>
           </a:p>
@@ -3267,7 +3267,7 @@
           <a:p>
             <a:fld id="{8D392E4A-9BBD-4BA9-88BA-F92D78D6CF9B}" type="datetimeFigureOut">
               <a:rPr lang="en-US" smtClean="0"/>
-              <a:t>4/22/2026</a:t>
+              <a:t>4/30/2026</a:t>
             </a:fld>
             <a:endParaRPr lang="en-US"/>
           </a:p>
@@ -3578,7 +3578,7 @@
           <a:p>
             <a:fld id="{8D392E4A-9BBD-4BA9-88BA-F92D78D6CF9B}" type="datetimeFigureOut">
               <a:rPr lang="en-US" smtClean="0"/>
-              <a:t>4/22/2026</a:t>
+              <a:t>4/30/2026</a:t>
             </a:fld>
             <a:endParaRPr lang="en-US"/>
           </a:p>
@@ -3866,7 +3866,7 @@
           <a:p>
             <a:fld id="{8D392E4A-9BBD-4BA9-88BA-F92D78D6CF9B}" type="datetimeFigureOut">
               <a:rPr lang="en-US" smtClean="0"/>
-              <a:t>4/22/2026</a:t>
+              <a:t>4/30/2026</a:t>
             </a:fld>
             <a:endParaRPr lang="en-US"/>
           </a:p>
@@ -4107,7 +4107,7 @@
           <a:p>
             <a:fld id="{8D392E4A-9BBD-4BA9-88BA-F92D78D6CF9B}" type="datetimeFigureOut">
               <a:rPr lang="en-US" smtClean="0"/>
-              <a:t>4/22/2026</a:t>
+              <a:t>4/30/2026</a:t>
             </a:fld>
             <a:endParaRPr lang="en-US"/>
           </a:p>
